--- a/.github/SBD_PYTHON_DECK-final.pptx
+++ b/.github/SBD_PYTHON_DECK-final.pptx
@@ -311,7 +311,7 @@
           <a:p>
             <a:fld id="{5BCAD085-E8A6-8845-BD4E-CB4CCA059FC4}" type="datetimeFigureOut">
               <a:rPr lang="en-US" smtClean="0"/>
-              <a:t>6/17/26</a:t>
+              <a:t>6/19/26</a:t>
             </a:fld>
             <a:endParaRPr lang="en-US"/>
           </a:p>
@@ -479,7 +479,7 @@
           <a:p>
             <a:fld id="{5BCAD085-E8A6-8845-BD4E-CB4CCA059FC4}" type="datetimeFigureOut">
               <a:rPr lang="en-US" smtClean="0"/>
-              <a:t>6/17/26</a:t>
+              <a:t>6/19/26</a:t>
             </a:fld>
             <a:endParaRPr lang="en-US"/>
           </a:p>
@@ -657,7 +657,7 @@
           <a:p>
             <a:fld id="{5BCAD085-E8A6-8845-BD4E-CB4CCA059FC4}" type="datetimeFigureOut">
               <a:rPr lang="en-US" smtClean="0"/>
-              <a:t>6/17/26</a:t>
+              <a:t>6/19/26</a:t>
             </a:fld>
             <a:endParaRPr lang="en-US"/>
           </a:p>
@@ -825,7 +825,7 @@
           <a:p>
             <a:fld id="{5BCAD085-E8A6-8845-BD4E-CB4CCA059FC4}" type="datetimeFigureOut">
               <a:rPr lang="en-US" smtClean="0"/>
-              <a:t>6/17/26</a:t>
+              <a:t>6/19/26</a:t>
             </a:fld>
             <a:endParaRPr lang="en-US"/>
           </a:p>
@@ -1070,7 +1070,7 @@
           <a:p>
             <a:fld id="{5BCAD085-E8A6-8845-BD4E-CB4CCA059FC4}" type="datetimeFigureOut">
               <a:rPr lang="en-US" smtClean="0"/>
-              <a:t>6/17/26</a:t>
+              <a:t>6/19/26</a:t>
             </a:fld>
             <a:endParaRPr lang="en-US"/>
           </a:p>
@@ -1355,7 +1355,7 @@
           <a:p>
             <a:fld id="{5BCAD085-E8A6-8845-BD4E-CB4CCA059FC4}" type="datetimeFigureOut">
               <a:rPr lang="en-US" smtClean="0"/>
-              <a:t>6/17/26</a:t>
+              <a:t>6/19/26</a:t>
             </a:fld>
             <a:endParaRPr lang="en-US"/>
           </a:p>
@@ -1774,7 +1774,7 @@
           <a:p>
             <a:fld id="{5BCAD085-E8A6-8845-BD4E-CB4CCA059FC4}" type="datetimeFigureOut">
               <a:rPr lang="en-US" smtClean="0"/>
-              <a:t>6/17/26</a:t>
+              <a:t>6/19/26</a:t>
             </a:fld>
             <a:endParaRPr lang="en-US"/>
           </a:p>
@@ -1891,7 +1891,7 @@
           <a:p>
             <a:fld id="{5BCAD085-E8A6-8845-BD4E-CB4CCA059FC4}" type="datetimeFigureOut">
               <a:rPr lang="en-US" smtClean="0"/>
-              <a:t>6/17/26</a:t>
+              <a:t>6/19/26</a:t>
             </a:fld>
             <a:endParaRPr lang="en-US"/>
           </a:p>
@@ -1986,7 +1986,7 @@
           <a:p>
             <a:fld id="{5BCAD085-E8A6-8845-BD4E-CB4CCA059FC4}" type="datetimeFigureOut">
               <a:rPr lang="en-US" smtClean="0"/>
-              <a:t>6/17/26</a:t>
+              <a:t>6/19/26</a:t>
             </a:fld>
             <a:endParaRPr lang="en-US"/>
           </a:p>
@@ -2261,7 +2261,7 @@
           <a:p>
             <a:fld id="{5BCAD085-E8A6-8845-BD4E-CB4CCA059FC4}" type="datetimeFigureOut">
               <a:rPr lang="en-US" smtClean="0"/>
-              <a:t>6/17/26</a:t>
+              <a:t>6/19/26</a:t>
             </a:fld>
             <a:endParaRPr lang="en-US"/>
           </a:p>
@@ -2513,7 +2513,7 @@
           <a:p>
             <a:fld id="{5BCAD085-E8A6-8845-BD4E-CB4CCA059FC4}" type="datetimeFigureOut">
               <a:rPr lang="en-US" smtClean="0"/>
-              <a:t>6/17/26</a:t>
+              <a:t>6/19/26</a:t>
             </a:fld>
             <a:endParaRPr lang="en-US"/>
           </a:p>
@@ -2724,7 +2724,7 @@
           <a:p>
             <a:fld id="{5BCAD085-E8A6-8845-BD4E-CB4CCA059FC4}" type="datetimeFigureOut">
               <a:rPr lang="en-US" smtClean="0"/>
-              <a:t>6/17/26</a:t>
+              <a:t>6/19/26</a:t>
             </a:fld>
             <a:endParaRPr lang="en-US"/>
           </a:p>
@@ -3602,40 +3602,6 @@
           </a:p>
         </p:txBody>
       </p:sp>
-      <p:sp>
-        <p:nvSpPr>
-          <p:cNvPr id="6" name="TextBox 5"/>
-          <p:cNvSpPr txBox="1"/>
-          <p:nvPr/>
-        </p:nvSpPr>
-        <p:spPr>
-          <a:xfrm>
-            <a:off x="457200" y="6446520"/>
-            <a:ext cx="11247120" cy="365760"/>
-          </a:xfrm>
-          <a:prstGeom prst="rect">
-            <a:avLst/>
-          </a:prstGeom>
-          <a:noFill/>
-        </p:spPr>
-        <p:txBody>
-          <a:bodyPr wrap="none">
-            <a:spAutoFit/>
-          </a:bodyPr>
-          <a:lstStyle/>
-          <a:p>
-            <a:r>
-              <a:rPr sz="1000" i="1">
-                <a:solidFill>
-                  <a:srgbClr val="69767A"/>
-                </a:solidFill>
-                <a:latin typeface="Calibri"/>
-              </a:rPr>
-              <a:t>Slide 12 — backup</a:t>
-            </a:r>
-          </a:p>
-        </p:txBody>
-      </p:sp>
     </p:spTree>
   </p:cSld>
   <p:clrMapOvr>
@@ -12288,40 +12254,6 @@
                 <a:latin typeface="Calibri"/>
               </a:rPr>
               <a:t>needs to be set properly </a:t>
-            </a:r>
-          </a:p>
-        </p:txBody>
-      </p:sp>
-      <p:sp>
-        <p:nvSpPr>
-          <p:cNvPr id="7" name="TextBox 6"/>
-          <p:cNvSpPr txBox="1"/>
-          <p:nvPr/>
-        </p:nvSpPr>
-        <p:spPr>
-          <a:xfrm>
-            <a:off x="457200" y="6446520"/>
-            <a:ext cx="11247120" cy="365760"/>
-          </a:xfrm>
-          <a:prstGeom prst="rect">
-            <a:avLst/>
-          </a:prstGeom>
-          <a:noFill/>
-        </p:spPr>
-        <p:txBody>
-          <a:bodyPr wrap="none">
-            <a:spAutoFit/>
-          </a:bodyPr>
-          <a:lstStyle/>
-          <a:p>
-            <a:r>
-              <a:rPr sz="1000" i="1">
-                <a:solidFill>
-                  <a:srgbClr val="69767A"/>
-                </a:solidFill>
-                <a:latin typeface="Calibri"/>
-              </a:rPr>
-              <a:t>Slide 9 — HPC pain (build matrix)</a:t>
             </a:r>
           </a:p>
         </p:txBody>
